--- a/sr_ancova_framework/pre_submission/figures.pptx
+++ b/sr_ancova_framework/pre_submission/figures.pptx
@@ -3335,7 +3335,7 @@
       </p:sp>
       <p:pic>
         <p:nvPicPr>
-          <p:cNvPr id="3" name="Picture 2" descr="fig3_detection_probability.png"/>
+          <p:cNvPr id="3" name="Picture 2" descr="fig3_optimal_rho.png"/>
           <p:cNvPicPr>
             <a:picLocks noChangeAspect="1"/>
           </p:cNvPicPr>
@@ -3349,8 +3349,8 @@
         </p:blipFill>
         <p:spPr>
           <a:xfrm>
-            <a:off x="781290" y="822960"/>
-            <a:ext cx="10629114" cy="4572000"/>
+            <a:off x="746159" y="822960"/>
+            <a:ext cx="10699376" cy="4572000"/>
           </a:xfrm>
           <a:prstGeom prst="rect">
             <a:avLst/>
@@ -3383,7 +3383,7 @@
               <a:defRPr sz="1200"/>
             </a:pPr>
             <a:r>
-              <a:t>Detection probability P_D and false alarm probability P_FA as functions of input noise level for different covariate model accuracies ρ. Higher ρ suppresses both P_D and P_FA by reducing effective noise; the net effect on detection performance depends on the operating regime.</a:t>
+              <a:t>Optimal noise model accuracy ρ* and the corresponding SNR improvement. (a) When σ &lt; θ (SR regime, yellow shading), ρ* = 0: any noise removal degrades performance. When σ &gt; θ (excess noise regime, blue shading), ρ* increases to bring effective noise to the SR optimum. (b) SNR improvement at optimal ρ* grows exponentially with input noise.</a:t>
             </a:r>
           </a:p>
         </p:txBody>
@@ -3439,7 +3439,7 @@
       </p:sp>
       <p:pic>
         <p:nvPicPr>
-          <p:cNvPr id="3" name="Picture 2" descr="fig4_roc_comparison.png"/>
+          <p:cNvPr id="3" name="Picture 2" descr="fig4_detection_probability.png"/>
           <p:cNvPicPr>
             <a:picLocks noChangeAspect="1"/>
           </p:cNvPicPr>
@@ -3453,8 +3453,8 @@
         </p:blipFill>
         <p:spPr>
           <a:xfrm>
-            <a:off x="3866509" y="822960"/>
-            <a:ext cx="4458676" cy="4572000"/>
+            <a:off x="781290" y="822960"/>
+            <a:ext cx="10629114" cy="4572000"/>
           </a:xfrm>
           <a:prstGeom prst="rect">
             <a:avLst/>
@@ -3487,7 +3487,7 @@
               <a:defRPr sz="1200"/>
             </a:pPr>
             <a:r>
-              <a:t>ROC curves at fixed input noise σ_n/θ = 1.5 (excess noise regime) for different covariate adjustment levels. In this regime, higher ρ improves the ROC curve, confirming that covariate adjustment is beneficial when the system operates above the SR optimum.</a:t>
+              <a:t>Detection probability P_D and false alarm probability P_FA as functions of input noise level for different covariate model accuracies ρ. Higher ρ suppresses both P_D and P_FA by reducing effective noise; the net effect on detection performance depends on the operating regime.</a:t>
             </a:r>
           </a:p>
         </p:txBody>
@@ -3543,7 +3543,7 @@
       </p:sp>
       <p:pic>
         <p:nvPicPr>
-          <p:cNvPr id="3" name="Picture 2" descr="fig5_optimal_rho.png"/>
+          <p:cNvPr id="3" name="Picture 2" descr="fig5_roc_comparison.png"/>
           <p:cNvPicPr>
             <a:picLocks noChangeAspect="1"/>
           </p:cNvPicPr>
@@ -3557,8 +3557,8 @@
         </p:blipFill>
         <p:spPr>
           <a:xfrm>
-            <a:off x="746159" y="822960"/>
-            <a:ext cx="10699376" cy="4572000"/>
+            <a:off x="3866509" y="822960"/>
+            <a:ext cx="4458676" cy="4572000"/>
           </a:xfrm>
           <a:prstGeom prst="rect">
             <a:avLst/>
@@ -3591,7 +3591,7 @@
               <a:defRPr sz="1200"/>
             </a:pPr>
             <a:r>
-              <a:t>Optimal noise model accuracy ρ* and the corresponding SNR improvement. (a) When σ &lt; θ (SR regime, yellow shading), ρ* = 0: any noise removal degrades performance. When σ &gt; θ (excess noise regime, blue shading), ρ* increases to bring effective noise to the SR optimum. (b) SNR improvement at optimal ρ* grows exponentially with input noise.</a:t>
+              <a:t>ROC curves at fixed input noise σ_n/θ = 1.5 (excess noise regime) for different covariate adjustment levels (A/θ = 0.4). In this regime, higher ρ improves the ROC curve, confirming that covariate adjustment is beneficial when the system operates above the SR optimum.</a:t>
             </a:r>
           </a:p>
         </p:txBody>
@@ -3647,7 +3647,7 @@
       </p:sp>
       <p:pic>
         <p:nvPicPr>
-          <p:cNvPr id="3" name="Picture 2" descr="fig6_dvs_application.png"/>
+          <p:cNvPr id="3" name="Picture 2" descr="fig6_mutual_information.png"/>
           <p:cNvPicPr>
             <a:picLocks noChangeAspect="1"/>
           </p:cNvPicPr>
@@ -3661,8 +3661,8 @@
         </p:blipFill>
         <p:spPr>
           <a:xfrm>
-            <a:off x="779047" y="822960"/>
-            <a:ext cx="10633601" cy="4572000"/>
+            <a:off x="2801318" y="822960"/>
+            <a:ext cx="6589058" cy="4572000"/>
           </a:xfrm>
           <a:prstGeom prst="rect">
             <a:avLst/>
@@ -3695,7 +3695,7 @@
               <a:defRPr sz="1200"/>
             </a:pPr>
             <a:r>
-              <a:t>Application to dynamic vision sensor (DVS) astronomical observation. (a) ROC-AUC for noise classification: the Fano filter (covariate adjustment approach) achieves AUC = 0.866, far exceeding temporal filtering and neural methods. (b) NRR vs SPR trade-off: the Fano filter preserves 93.9% of signal events while removing 71.3% of noise.</a:t>
+              <a:t>Mutual information I(S; E) between the periodic signal and the event stream as a function of input noise level. Covariate adjustment (ρ = 0.8) shifts the MI peak to higher input noise, consistent with the SR curve analysis.</a:t>
             </a:r>
           </a:p>
         </p:txBody>
@@ -3751,7 +3751,7 @@
       </p:sp>
       <p:pic>
         <p:nvPicPr>
-          <p:cNvPr id="3" name="Picture 2" descr="fig7_mutual_information.png"/>
+          <p:cNvPr id="3" name="Picture 2" descr="fig7_dvs_application.png"/>
           <p:cNvPicPr>
             <a:picLocks noChangeAspect="1"/>
           </p:cNvPicPr>
@@ -3765,8 +3765,8 @@
         </p:blipFill>
         <p:spPr>
           <a:xfrm>
-            <a:off x="2801318" y="822960"/>
-            <a:ext cx="6589058" cy="4572000"/>
+            <a:off x="779047" y="822960"/>
+            <a:ext cx="10633601" cy="4572000"/>
           </a:xfrm>
           <a:prstGeom prst="rect">
             <a:avLst/>
@@ -3799,7 +3799,7 @@
               <a:defRPr sz="1200"/>
             </a:pPr>
             <a:r>
-              <a:t>Mutual information I(S; E) between the periodic signal and the event stream as a function of input noise level. Covariate adjustment (ρ = 0.8) shifts the MI peak to higher input noise, consistent with the SR curve analysis.</a:t>
+              <a:t>Application to dynamic vision sensor (DVS) astronomical observation. (a) ROC-AUC for noise classification: the Fano filter (covariate adjustment approach) achieves AUC = 0.866, far exceeding temporal filtering and neural methods. (b) NRR vs SPR trade-off: the Fano filter preserves 93.9% of signal events while removing 71.3% of noise.</a:t>
             </a:r>
           </a:p>
         </p:txBody>

--- a/sr_ancova_framework/pre_submission/figures.pptx
+++ b/sr_ancova_framework/pre_submission/figures.pptx
@@ -3142,7 +3142,7 @@
         <p:spPr>
           <a:xfrm>
             <a:off x="609447" y="822960"/>
-            <a:ext cx="10972800" cy="3157901"/>
+            <a:ext cx="10972800" cy="3199174"/>
           </a:xfrm>
           <a:prstGeom prst="rect">
             <a:avLst/>
@@ -3157,7 +3157,7 @@
         </p:nvSpPr>
         <p:spPr>
           <a:xfrm>
-            <a:off x="457200" y="4118021"/>
+            <a:off x="457200" y="4159294"/>
             <a:ext cx="10972800" cy="1097280"/>
           </a:xfrm>
           <a:prstGeom prst="rect">

--- a/sr_ancova_framework/pre_submission/figures.pptx
+++ b/sr_ancova_framework/pre_submission/figures.pptx
@@ -3102,7 +3102,7 @@
         </p:nvSpPr>
         <p:spPr>
           <a:xfrm>
-            <a:off x="457200" y="182880"/>
+            <a:off x="274320" y="137160"/>
             <a:ext cx="10972800" cy="457200"/>
           </a:xfrm>
           <a:prstGeom prst="rect">
@@ -3117,17 +3117,48 @@
           <a:lstStyle/>
           <a:p>
             <a:pPr algn="l">
-              <a:defRPr sz="2400" b="1"/>
+              <a:defRPr sz="2200" b="1"/>
             </a:pPr>
             <a:r>
-              <a:t>Figure 1</a:t>
+              <a:t>Figure 1: Covariate-adjusted SR framework</a:t>
+            </a:r>
+          </a:p>
+        </p:txBody>
+      </p:sp>
+      <p:sp>
+        <p:nvSpPr>
+          <p:cNvPr id="3" name="TextBox 2"/>
+          <p:cNvSpPr txBox="1"/>
+          <p:nvPr/>
+        </p:nvSpPr>
+        <p:spPr>
+          <a:xfrm>
+            <a:off x="457200" y="594360"/>
+            <a:ext cx="2286000" cy="320040"/>
+          </a:xfrm>
+          <a:prstGeom prst="rect">
+            <a:avLst/>
+          </a:prstGeom>
+          <a:noFill/>
+        </p:spPr>
+        <p:txBody>
+          <a:bodyPr wrap="square">
+            <a:spAutoFit/>
+          </a:bodyPr>
+          <a:lstStyle/>
+          <a:p>
+            <a:pPr algn="l">
+              <a:defRPr sz="1400" b="1"/>
+            </a:pPr>
+            <a:r>
+              <a:t>(a) Threshold detector</a:t>
             </a:r>
           </a:p>
         </p:txBody>
       </p:sp>
       <p:pic>
         <p:nvPicPr>
-          <p:cNvPr id="3" name="Picture 2" descr="fig1_schematic.png"/>
+          <p:cNvPr id="4" name="Picture 3" descr="fig1a.png"/>
           <p:cNvPicPr>
             <a:picLocks noChangeAspect="1"/>
           </p:cNvPicPr>
@@ -3141,8 +3172,8 @@
         </p:blipFill>
         <p:spPr>
           <a:xfrm>
-            <a:off x="609447" y="822960"/>
-            <a:ext cx="10972800" cy="3199174"/>
+            <a:off x="457200" y="914400"/>
+            <a:ext cx="3474720" cy="2743200"/>
           </a:xfrm>
           <a:prstGeom prst="rect">
             <a:avLst/>
@@ -3151,14 +3182,14 @@
       </p:pic>
       <p:sp>
         <p:nvSpPr>
-          <p:cNvPr id="4" name="TextBox 3"/>
+          <p:cNvPr id="5" name="TextBox 4"/>
           <p:cNvSpPr txBox="1"/>
           <p:nvPr/>
         </p:nvSpPr>
         <p:spPr>
           <a:xfrm>
-            <a:off x="457200" y="4159294"/>
-            <a:ext cx="10972800" cy="1097280"/>
+            <a:off x="457200" y="3749040"/>
+            <a:ext cx="3474720" cy="731520"/>
           </a:xfrm>
           <a:prstGeom prst="rect">
             <a:avLst/>
@@ -3172,10 +3203,315 @@
           <a:lstStyle/>
           <a:p>
             <a:pPr algn="l">
-              <a:defRPr sz="1200"/>
+              <a:defRPr sz="1000" b="0"/>
             </a:pPr>
             <a:r>
-              <a:t>Conceptual schematic of the covariate-adjusted stochastic resonance framework. (a) Threshold-based event detector: a weak periodic signal s(t) embedded in Gaussian noise n(t) triggers events when |x(t)| exceeds threshold θ. (b) Stochastic resonance: event rate modulation is maximized at an intermediate noise level (green), suppressed at too-low noise (red), and washed out at too-high noise (blue). (c) Covariate adjustment narrows the residual noise distribution, effectively shifting the operating point on the SR curve.</a:t>
+              <a:t>Signal s(t) + noise n(t)</a:t>
+            </a:r>
+            <a:br/>
+            <a:r>
+              <a:t>→ threshold θ → events E(t)</a:t>
+            </a:r>
+          </a:p>
+        </p:txBody>
+      </p:sp>
+      <p:sp>
+        <p:nvSpPr>
+          <p:cNvPr id="6" name="TextBox 5"/>
+          <p:cNvSpPr txBox="1"/>
+          <p:nvPr/>
+        </p:nvSpPr>
+        <p:spPr>
+          <a:xfrm>
+            <a:off x="4160520" y="594360"/>
+            <a:ext cx="2286000" cy="320040"/>
+          </a:xfrm>
+          <a:prstGeom prst="rect">
+            <a:avLst/>
+          </a:prstGeom>
+          <a:noFill/>
+        </p:spPr>
+        <p:txBody>
+          <a:bodyPr wrap="square">
+            <a:spAutoFit/>
+          </a:bodyPr>
+          <a:lstStyle/>
+          <a:p>
+            <a:pPr algn="l">
+              <a:defRPr sz="1400" b="1"/>
+            </a:pPr>
+            <a:r>
+              <a:t>(b) Stochastic resonance</a:t>
+            </a:r>
+          </a:p>
+        </p:txBody>
+      </p:sp>
+      <p:pic>
+        <p:nvPicPr>
+          <p:cNvPr id="7" name="Picture 6" descr="fig1b.png"/>
+          <p:cNvPicPr>
+            <a:picLocks noChangeAspect="1"/>
+          </p:cNvPicPr>
+          <p:nvPr/>
+        </p:nvPicPr>
+        <p:blipFill>
+          <a:blip r:embed="rId3"/>
+          <a:stretch>
+            <a:fillRect/>
+          </a:stretch>
+        </p:blipFill>
+        <p:spPr>
+          <a:xfrm>
+            <a:off x="4160520" y="914400"/>
+            <a:ext cx="3474720" cy="2743200"/>
+          </a:xfrm>
+          <a:prstGeom prst="rect">
+            <a:avLst/>
+          </a:prstGeom>
+        </p:spPr>
+      </p:pic>
+      <p:sp>
+        <p:nvSpPr>
+          <p:cNvPr id="8" name="TextBox 7"/>
+          <p:cNvSpPr txBox="1"/>
+          <p:nvPr/>
+        </p:nvSpPr>
+        <p:spPr>
+          <a:xfrm>
+            <a:off x="4160520" y="3749040"/>
+            <a:ext cx="3474720" cy="731520"/>
+          </a:xfrm>
+          <a:prstGeom prst="rect">
+            <a:avLst/>
+          </a:prstGeom>
+          <a:noFill/>
+        </p:spPr>
+        <p:txBody>
+          <a:bodyPr wrap="square">
+            <a:spAutoFit/>
+          </a:bodyPr>
+          <a:lstStyle/>
+          <a:p>
+            <a:pPr algn="l">
+              <a:defRPr sz="1000" b="0"/>
+            </a:pPr>
+            <a:r>
+              <a:t>Event-rate modulation peaks</a:t>
+            </a:r>
+            <a:br/>
+            <a:r>
+              <a:t>at intermediate noise (σ ≈ θ)</a:t>
+            </a:r>
+          </a:p>
+        </p:txBody>
+      </p:sp>
+      <p:sp>
+        <p:nvSpPr>
+          <p:cNvPr id="9" name="TextBox 8"/>
+          <p:cNvSpPr txBox="1"/>
+          <p:nvPr/>
+        </p:nvSpPr>
+        <p:spPr>
+          <a:xfrm>
+            <a:off x="7863840" y="594360"/>
+            <a:ext cx="2286000" cy="320040"/>
+          </a:xfrm>
+          <a:prstGeom prst="rect">
+            <a:avLst/>
+          </a:prstGeom>
+          <a:noFill/>
+        </p:spPr>
+        <p:txBody>
+          <a:bodyPr wrap="square">
+            <a:spAutoFit/>
+          </a:bodyPr>
+          <a:lstStyle/>
+          <a:p>
+            <a:pPr algn="l">
+              <a:defRPr sz="1400" b="1"/>
+            </a:pPr>
+            <a:r>
+              <a:t>(c) Covariate adjustment</a:t>
+            </a:r>
+          </a:p>
+        </p:txBody>
+      </p:sp>
+      <p:pic>
+        <p:nvPicPr>
+          <p:cNvPr id="10" name="Picture 9" descr="fig1c.png"/>
+          <p:cNvPicPr>
+            <a:picLocks noChangeAspect="1"/>
+          </p:cNvPicPr>
+          <p:nvPr/>
+        </p:nvPicPr>
+        <p:blipFill>
+          <a:blip r:embed="rId4"/>
+          <a:stretch>
+            <a:fillRect/>
+          </a:stretch>
+        </p:blipFill>
+        <p:spPr>
+          <a:xfrm>
+            <a:off x="7863840" y="914400"/>
+            <a:ext cx="3474720" cy="2743200"/>
+          </a:xfrm>
+          <a:prstGeom prst="rect">
+            <a:avLst/>
+          </a:prstGeom>
+        </p:spPr>
+      </p:pic>
+      <p:sp>
+        <p:nvSpPr>
+          <p:cNvPr id="11" name="TextBox 10"/>
+          <p:cNvSpPr txBox="1"/>
+          <p:nvPr/>
+        </p:nvSpPr>
+        <p:spPr>
+          <a:xfrm>
+            <a:off x="7863840" y="3749040"/>
+            <a:ext cx="3474720" cy="731520"/>
+          </a:xfrm>
+          <a:prstGeom prst="rect">
+            <a:avLst/>
+          </a:prstGeom>
+          <a:noFill/>
+        </p:spPr>
+        <p:txBody>
+          <a:bodyPr wrap="square">
+            <a:spAutoFit/>
+          </a:bodyPr>
+          <a:lstStyle/>
+          <a:p>
+            <a:pPr algn="l">
+              <a:defRPr sz="1000" b="0"/>
+            </a:pPr>
+            <a:r>
+              <a:t>Adjustment narrows noise pdf,</a:t>
+            </a:r>
+            <a:br/>
+            <a:r>
+              <a:t>shifts operating point on SR curve</a:t>
+            </a:r>
+          </a:p>
+        </p:txBody>
+      </p:sp>
+      <p:sp>
+        <p:nvSpPr>
+          <p:cNvPr id="12" name="Right Arrow 11"/>
+          <p:cNvSpPr/>
+          <p:nvPr/>
+        </p:nvSpPr>
+        <p:spPr>
+          <a:xfrm>
+            <a:off x="3886200" y="2148840"/>
+            <a:ext cx="228600" cy="274320"/>
+          </a:xfrm>
+          <a:prstGeom prst="rightArrow">
+            <a:avLst/>
+          </a:prstGeom>
+          <a:solidFill>
+            <a:srgbClr val="666666"/>
+          </a:solidFill>
+          <a:ln>
+            <a:solidFill>
+              <a:srgbClr val="444444"/>
+            </a:solidFill>
+          </a:ln>
+        </p:spPr>
+        <p:style>
+          <a:lnRef idx="1">
+            <a:schemeClr val="accent1"/>
+          </a:lnRef>
+          <a:fillRef idx="3">
+            <a:schemeClr val="accent1"/>
+          </a:fillRef>
+          <a:effectRef idx="2">
+            <a:schemeClr val="accent1"/>
+          </a:effectRef>
+          <a:fontRef idx="minor">
+            <a:schemeClr val="lt1"/>
+          </a:fontRef>
+        </p:style>
+        <p:txBody>
+          <a:bodyPr rtlCol="0" anchor="ctr"/>
+          <a:lstStyle/>
+          <a:p>
+            <a:pPr algn="ctr"/>
+          </a:p>
+        </p:txBody>
+      </p:sp>
+      <p:sp>
+        <p:nvSpPr>
+          <p:cNvPr id="13" name="Right Arrow 12"/>
+          <p:cNvSpPr/>
+          <p:nvPr/>
+        </p:nvSpPr>
+        <p:spPr>
+          <a:xfrm>
+            <a:off x="7589520" y="2148840"/>
+            <a:ext cx="228600" cy="274320"/>
+          </a:xfrm>
+          <a:prstGeom prst="rightArrow">
+            <a:avLst/>
+          </a:prstGeom>
+          <a:solidFill>
+            <a:srgbClr val="666666"/>
+          </a:solidFill>
+          <a:ln>
+            <a:solidFill>
+              <a:srgbClr val="444444"/>
+            </a:solidFill>
+          </a:ln>
+        </p:spPr>
+        <p:style>
+          <a:lnRef idx="1">
+            <a:schemeClr val="accent1"/>
+          </a:lnRef>
+          <a:fillRef idx="3">
+            <a:schemeClr val="accent1"/>
+          </a:fillRef>
+          <a:effectRef idx="2">
+            <a:schemeClr val="accent1"/>
+          </a:effectRef>
+          <a:fontRef idx="minor">
+            <a:schemeClr val="lt1"/>
+          </a:fontRef>
+        </p:style>
+        <p:txBody>
+          <a:bodyPr rtlCol="0" anchor="ctr"/>
+          <a:lstStyle/>
+          <a:p>
+            <a:pPr algn="ctr"/>
+          </a:p>
+        </p:txBody>
+      </p:sp>
+      <p:sp>
+        <p:nvSpPr>
+          <p:cNvPr id="14" name="TextBox 13"/>
+          <p:cNvSpPr txBox="1"/>
+          <p:nvPr/>
+        </p:nvSpPr>
+        <p:spPr>
+          <a:xfrm>
+            <a:off x="457200" y="4572000"/>
+            <a:ext cx="10972800" cy="914400"/>
+          </a:xfrm>
+          <a:prstGeom prst="rect">
+            <a:avLst/>
+          </a:prstGeom>
+          <a:noFill/>
+        </p:spPr>
+        <p:txBody>
+          <a:bodyPr wrap="square">
+            <a:spAutoFit/>
+          </a:bodyPr>
+          <a:lstStyle/>
+          <a:p>
+            <a:pPr algn="l">
+              <a:defRPr sz="1100" b="0"/>
+            </a:pPr>
+            <a:r>
+              <a:t>FIG. 1. Conceptual schematic of covariate-adjusted SR. (a) Threshold detector: subthreshold signal + noise → events. (b) SR: event-rate modulation peaks at σ ≈ θ. (c) Covariate adjustment with correlation ρ narrows the residual, equivalent to leftward shift on the SR curve.</a:t>
             </a:r>
           </a:p>
         </p:txBody>
@@ -3276,10 +3612,10 @@
           <a:lstStyle/>
           <a:p>
             <a:pPr algn="l">
-              <a:defRPr sz="1200"/>
+              <a:defRPr sz="1200" b="0"/>
             </a:pPr>
             <a:r>
-              <a:t>Stochastic resonance curves for a threshold detector (A/θ = 0.3). Solid lines: analytical SNR from two-state theory. Points with error bars: Monte Carlo validation via cross-correlation. Covariate adjustment (ρ &gt; 0) shifts the SR peak to higher input noise levels, meaning the detector tolerates more environmental noise when a good noise model is available.</a:t>
+              <a:t>SR curves for a threshold detector (A/θ = 0.3). Solid: analytical SNR. Circles: Monte Carlo (15 trials). Covariate adjustment shifts the peak rightward.</a:t>
             </a:r>
           </a:p>
         </p:txBody>
@@ -3380,10 +3716,10 @@
           <a:lstStyle/>
           <a:p>
             <a:pPr algn="l">
-              <a:defRPr sz="1200"/>
+              <a:defRPr sz="1200" b="0"/>
             </a:pPr>
             <a:r>
-              <a:t>Optimal noise model accuracy ρ* and the corresponding SNR improvement. (a) When σ &lt; θ (SR regime, yellow shading), ρ* = 0: any noise removal degrades performance. When σ &gt; θ (excess noise regime, blue shading), ρ* increases to bring effective noise to the SR optimum. (b) SNR improvement at optimal ρ* grows exponentially with input noise.</a:t>
+              <a:t>Optimal model accuracy ρ* and SNR improvement. (a) ρ* = 0 in the SR regime (σ &lt; θ); rises steeply for σ &gt; θ. (b) SNR gain at optimal ρ* grows exponentially with input noise.</a:t>
             </a:r>
           </a:p>
         </p:txBody>
@@ -3484,10 +3820,10 @@
           <a:lstStyle/>
           <a:p>
             <a:pPr algn="l">
-              <a:defRPr sz="1200"/>
+              <a:defRPr sz="1200" b="0"/>
             </a:pPr>
             <a:r>
-              <a:t>Detection probability P_D and false alarm probability P_FA as functions of input noise level for different covariate model accuracies ρ. Higher ρ suppresses both P_D and P_FA by reducing effective noise; the net effect on detection performance depends on the operating regime.</a:t>
+              <a:t>P_D and P_FA vs. input noise for different ρ (A/θ = 0.4). Higher ρ suppresses both by reducing effective noise.</a:t>
             </a:r>
           </a:p>
         </p:txBody>
@@ -3588,10 +3924,10 @@
           <a:lstStyle/>
           <a:p>
             <a:pPr algn="l">
-              <a:defRPr sz="1200"/>
+              <a:defRPr sz="1200" b="0"/>
             </a:pPr>
             <a:r>
-              <a:t>ROC curves at fixed input noise σ_n/θ = 1.5 (excess noise regime) for different covariate adjustment levels (A/θ = 0.4). In this regime, higher ρ improves the ROC curve, confirming that covariate adjustment is beneficial when the system operates above the SR optimum.</a:t>
+              <a:t>ROC curves at σ/θ = 1.5 (excess noise regime, A/θ = 0.4). Higher ρ improves discrimination.</a:t>
             </a:r>
           </a:p>
         </p:txBody>
@@ -3692,10 +4028,10 @@
           <a:lstStyle/>
           <a:p>
             <a:pPr algn="l">
-              <a:defRPr sz="1200"/>
+              <a:defRPr sz="1200" b="0"/>
             </a:pPr>
             <a:r>
-              <a:t>Mutual information I(S; E) between the periodic signal and the event stream as a function of input noise level. Covariate adjustment (ρ = 0.8) shifts the MI peak to higher input noise, consistent with the SR curve analysis.</a:t>
+              <a:t>Mutual information I(S; E) vs. input noise. SR peak shifts rightward with covariate adjustment (ρ = 0.8).</a:t>
             </a:r>
           </a:p>
         </p:txBody>
@@ -3796,10 +4132,10 @@
           <a:lstStyle/>
           <a:p>
             <a:pPr algn="l">
-              <a:defRPr sz="1200"/>
+              <a:defRPr sz="1200" b="0"/>
             </a:pPr>
             <a:r>
-              <a:t>Application to dynamic vision sensor (DVS) astronomical observation. (a) ROC-AUC for noise classification: the Fano filter (covariate adjustment approach) achieves AUC = 0.866, far exceeding temporal filtering and neural methods. (b) NRR vs SPR trade-off: the Fano filter preserves 93.9% of signal events while removing 71.3% of noise.</a:t>
+              <a:t>DVS astronomical observation (EBSSA, 20 recordings). (a) ROC-AUC: Fano filter 0.866 vs temporal 0.534. (b) NRR-SPR: 71.3% noise removed, 93.9% signal preserved.</a:t>
             </a:r>
           </a:p>
         </p:txBody>
